--- a/make_presentation/templates/templates/creative/_10.pptx
+++ b/make_presentation/templates/templates/creative/_10.pptx
@@ -76,19 +76,7 @@
               <a:rPr b="0" lang="en-US" sz="4400" spc="-1" strike="noStrike">
                 <a:latin typeface="Arial"/>
               </a:rPr>
-              <a:t>Click to </a:t>
-            </a:r>
-            <a:r>
-              <a:rPr b="0" lang="en-US" sz="4400" spc="-1" strike="noStrike">
-                <a:latin typeface="Arial"/>
-              </a:rPr>
-              <a:t>move the </a:t>
-            </a:r>
-            <a:r>
-              <a:rPr b="0" lang="en-US" sz="4400" spc="-1" strike="noStrike">
-                <a:latin typeface="Arial"/>
-              </a:rPr>
-              <a:t>slide</a:t>
+              <a:t>Click to move the slide</a:t>
             </a:r>
             <a:endParaRPr b="0" lang="en-US" sz="4400" spc="-1" strike="noStrike">
               <a:latin typeface="Arial"/>
@@ -128,13 +116,7 @@
               <a:rPr b="0" lang="en-US" sz="2000" spc="-1" strike="noStrike">
                 <a:latin typeface="Arial"/>
               </a:rPr>
-              <a:t>Click to edit the </a:t>
-            </a:r>
-            <a:r>
-              <a:rPr b="0" lang="en-US" sz="2000" spc="-1" strike="noStrike">
-                <a:latin typeface="Arial"/>
-              </a:rPr>
-              <a:t>notes format</a:t>
+              <a:t>Click to edit the notes format</a:t>
             </a:r>
             <a:endParaRPr b="0" lang="en-US" sz="2000" spc="-1" strike="noStrike">
               <a:latin typeface="Arial"/>
@@ -319,7 +301,7 @@
             <a:pPr algn="r">
               <a:buNone/>
             </a:pPr>
-            <a:fld id="{CB8BACBD-131D-4B53-A2EA-AA9980B55E77}" type="slidenum">
+            <a:fld id="{835F784D-B5F1-4185-B7D9-AD4ACBE41259}" type="slidenum">
               <a:rPr b="0" lang="en-US" sz="1400" spc="-1" strike="noStrike">
                 <a:latin typeface="Times New Roman"/>
               </a:rPr>
@@ -367,7 +349,7 @@
         <p:spPr>
           <a:xfrm>
             <a:off x="685800" y="1143000"/>
-            <a:ext cx="5485680" cy="3085560"/>
+            <a:ext cx="5485320" cy="3085200"/>
           </a:xfrm>
           <a:prstGeom prst="rect">
             <a:avLst/>
@@ -390,7 +372,7 @@
         <p:spPr>
           <a:xfrm>
             <a:off x="685800" y="4400640"/>
-            <a:ext cx="5485680" cy="3599640"/>
+            <a:ext cx="5485320" cy="3599280"/>
           </a:xfrm>
           <a:prstGeom prst="rect">
             <a:avLst/>
@@ -424,7 +406,7 @@
         <p:spPr>
           <a:xfrm>
             <a:off x="3884760" y="8685360"/>
-            <a:ext cx="2971080" cy="457920"/>
+            <a:ext cx="2970720" cy="457560"/>
           </a:xfrm>
           <a:prstGeom prst="rect">
             <a:avLst/>
@@ -456,7 +438,7 @@
               </a:lnSpc>
               <a:buNone/>
             </a:pPr>
-            <a:fld id="{0A020825-5E78-44C3-91EF-06461E52F6F4}" type="slidenum">
+            <a:fld id="{31143DEB-9FB7-4DF9-B27B-6FC41C6147C9}" type="slidenum">
               <a:rPr b="0" lang="ru-RU" sz="1200" spc="-1" strike="noStrike">
                 <a:latin typeface="Times New Roman"/>
               </a:rPr>
@@ -503,7 +485,7 @@
         <p:spPr>
           <a:xfrm>
             <a:off x="685800" y="1143000"/>
-            <a:ext cx="5485680" cy="3085560"/>
+            <a:ext cx="5485320" cy="3085200"/>
           </a:xfrm>
           <a:prstGeom prst="rect">
             <a:avLst/>
@@ -526,7 +508,7 @@
         <p:spPr>
           <a:xfrm>
             <a:off x="685800" y="4400640"/>
-            <a:ext cx="5485680" cy="3599640"/>
+            <a:ext cx="5485320" cy="3599280"/>
           </a:xfrm>
           <a:prstGeom prst="rect">
             <a:avLst/>
@@ -560,7 +542,7 @@
         <p:spPr>
           <a:xfrm>
             <a:off x="3884760" y="8685360"/>
-            <a:ext cx="2971080" cy="457920"/>
+            <a:ext cx="2970720" cy="457560"/>
           </a:xfrm>
           <a:prstGeom prst="rect">
             <a:avLst/>
@@ -592,7 +574,7 @@
               </a:lnSpc>
               <a:buNone/>
             </a:pPr>
-            <a:fld id="{BD06BB0C-ECFD-4EC4-8134-45D9D8ED1C49}" type="slidenum">
+            <a:fld id="{FCFC0B19-BD74-4756-B265-C4AF1EFAB08B}" type="slidenum">
               <a:rPr b="0" lang="ru-RU" sz="1200" spc="-1" strike="noStrike">
                 <a:latin typeface="Times New Roman"/>
               </a:rPr>
@@ -639,7 +621,7 @@
         <p:spPr>
           <a:xfrm>
             <a:off x="685800" y="1143000"/>
-            <a:ext cx="5485680" cy="3085560"/>
+            <a:ext cx="5485320" cy="3085200"/>
           </a:xfrm>
           <a:prstGeom prst="rect">
             <a:avLst/>
@@ -662,7 +644,7 @@
         <p:spPr>
           <a:xfrm>
             <a:off x="685800" y="4400640"/>
-            <a:ext cx="5485680" cy="3599640"/>
+            <a:ext cx="5485320" cy="3599280"/>
           </a:xfrm>
           <a:prstGeom prst="rect">
             <a:avLst/>
@@ -696,7 +678,7 @@
         <p:spPr>
           <a:xfrm>
             <a:off x="3884760" y="8685360"/>
-            <a:ext cx="2971080" cy="457920"/>
+            <a:ext cx="2970720" cy="457560"/>
           </a:xfrm>
           <a:prstGeom prst="rect">
             <a:avLst/>
@@ -728,7 +710,7 @@
               </a:lnSpc>
               <a:buNone/>
             </a:pPr>
-            <a:fld id="{05848DF3-8004-48D6-87C3-93DCAC7373F8}" type="slidenum">
+            <a:fld id="{A40B530D-016F-4C46-A57D-9D918EBABE30}" type="slidenum">
               <a:rPr b="0" lang="ru-RU" sz="1200" spc="-1" strike="noStrike">
                 <a:latin typeface="Times New Roman"/>
               </a:rPr>
@@ -796,7 +778,7 @@
         <p:txBody>
           <a:bodyPr/>
           <a:p>
-            <a:fld id="{6D839575-87C8-4828-8527-7901246AEDF1}" type="slidenum">
+            <a:fld id="{CDC45DC5-8BCA-4831-81CE-45206561D659}" type="slidenum">
               <a:t>&lt;#&gt;</a:t>
             </a:fld>
           </a:p>
@@ -858,7 +840,7 @@
         <p:spPr>
           <a:xfrm>
             <a:off x="1143000" y="841680"/>
-            <a:ext cx="6857280" cy="1789920"/>
+            <a:ext cx="6856920" cy="1789560"/>
           </a:xfrm>
           <a:prstGeom prst="rect">
             <a:avLst/>
@@ -895,7 +877,7 @@
         <p:spPr>
           <a:xfrm>
             <a:off x="457200" y="1203480"/>
-            <a:ext cx="8229240" cy="1422720"/>
+            <a:ext cx="8228880" cy="1422360"/>
           </a:xfrm>
           <a:prstGeom prst="rect">
             <a:avLst/>
@@ -928,8 +910,8 @@
         </p:nvSpPr>
         <p:spPr>
           <a:xfrm>
-            <a:off x="457200" y="2761920"/>
-            <a:ext cx="8229240" cy="1422720"/>
+            <a:off x="457200" y="2761200"/>
+            <a:ext cx="8228880" cy="1422360"/>
           </a:xfrm>
           <a:prstGeom prst="rect">
             <a:avLst/>
@@ -984,7 +966,7 @@
         <p:txBody>
           <a:bodyPr/>
           <a:p>
-            <a:fld id="{D7DA2463-6E63-4269-83A7-1031C5CEFD9F}" type="slidenum">
+            <a:fld id="{2F3B5D08-0E17-48C9-B6E9-3167F02D57D1}" type="slidenum">
               <a:t>&lt;#&gt;</a:t>
             </a:fld>
           </a:p>
@@ -1046,7 +1028,7 @@
         <p:spPr>
           <a:xfrm>
             <a:off x="1143000" y="841680"/>
-            <a:ext cx="6857280" cy="1789920"/>
+            <a:ext cx="6856920" cy="1789560"/>
           </a:xfrm>
           <a:prstGeom prst="rect">
             <a:avLst/>
@@ -1083,7 +1065,7 @@
         <p:spPr>
           <a:xfrm>
             <a:off x="457200" y="1203480"/>
-            <a:ext cx="4015800" cy="1422720"/>
+            <a:ext cx="4015440" cy="1422360"/>
           </a:xfrm>
           <a:prstGeom prst="rect">
             <a:avLst/>
@@ -1116,8 +1098,8 @@
         </p:nvSpPr>
         <p:spPr>
           <a:xfrm>
-            <a:off x="4674240" y="1203480"/>
-            <a:ext cx="4015800" cy="1422720"/>
+            <a:off x="4673880" y="1203480"/>
+            <a:ext cx="4015440" cy="1422360"/>
           </a:xfrm>
           <a:prstGeom prst="rect">
             <a:avLst/>
@@ -1150,8 +1132,8 @@
         </p:nvSpPr>
         <p:spPr>
           <a:xfrm>
-            <a:off x="457200" y="2761920"/>
-            <a:ext cx="4015800" cy="1422720"/>
+            <a:off x="457200" y="2761200"/>
+            <a:ext cx="4015440" cy="1422360"/>
           </a:xfrm>
           <a:prstGeom prst="rect">
             <a:avLst/>
@@ -1184,8 +1166,8 @@
         </p:nvSpPr>
         <p:spPr>
           <a:xfrm>
-            <a:off x="4674240" y="2761920"/>
-            <a:ext cx="4015800" cy="1422720"/>
+            <a:off x="4673880" y="2761200"/>
+            <a:ext cx="4015440" cy="1422360"/>
           </a:xfrm>
           <a:prstGeom prst="rect">
             <a:avLst/>
@@ -1240,7 +1222,7 @@
         <p:txBody>
           <a:bodyPr/>
           <a:p>
-            <a:fld id="{39F87FE6-F7F9-48B7-87E8-05692EC86FD8}" type="slidenum">
+            <a:fld id="{DA6DD0F2-65D1-4394-AFDE-B17CDB6A31BF}" type="slidenum">
               <a:t>&lt;#&gt;</a:t>
             </a:fld>
           </a:p>
@@ -1302,7 +1284,7 @@
         <p:spPr>
           <a:xfrm>
             <a:off x="1143000" y="841680"/>
-            <a:ext cx="6857280" cy="1789920"/>
+            <a:ext cx="6856920" cy="1789560"/>
           </a:xfrm>
           <a:prstGeom prst="rect">
             <a:avLst/>
@@ -1339,7 +1321,7 @@
         <p:spPr>
           <a:xfrm>
             <a:off x="457200" y="1203480"/>
-            <a:ext cx="2649600" cy="1422720"/>
+            <a:ext cx="2649600" cy="1422360"/>
           </a:xfrm>
           <a:prstGeom prst="rect">
             <a:avLst/>
@@ -1373,7 +1355,7 @@
         <p:spPr>
           <a:xfrm>
             <a:off x="3239640" y="1203480"/>
-            <a:ext cx="2649600" cy="1422720"/>
+            <a:ext cx="2649600" cy="1422360"/>
           </a:xfrm>
           <a:prstGeom prst="rect">
             <a:avLst/>
@@ -1407,7 +1389,7 @@
         <p:spPr>
           <a:xfrm>
             <a:off x="6022080" y="1203480"/>
-            <a:ext cx="2649600" cy="1422720"/>
+            <a:ext cx="2649600" cy="1422360"/>
           </a:xfrm>
           <a:prstGeom prst="rect">
             <a:avLst/>
@@ -1440,8 +1422,8 @@
         </p:nvSpPr>
         <p:spPr>
           <a:xfrm>
-            <a:off x="457200" y="2761920"/>
-            <a:ext cx="2649600" cy="1422720"/>
+            <a:off x="457200" y="2761200"/>
+            <a:ext cx="2649600" cy="1422360"/>
           </a:xfrm>
           <a:prstGeom prst="rect">
             <a:avLst/>
@@ -1474,8 +1456,8 @@
         </p:nvSpPr>
         <p:spPr>
           <a:xfrm>
-            <a:off x="3239640" y="2761920"/>
-            <a:ext cx="2649600" cy="1422720"/>
+            <a:off x="3239640" y="2761200"/>
+            <a:ext cx="2649600" cy="1422360"/>
           </a:xfrm>
           <a:prstGeom prst="rect">
             <a:avLst/>
@@ -1508,8 +1490,8 @@
         </p:nvSpPr>
         <p:spPr>
           <a:xfrm>
-            <a:off x="6022080" y="2761920"/>
-            <a:ext cx="2649600" cy="1422720"/>
+            <a:off x="6022080" y="2761200"/>
+            <a:ext cx="2649600" cy="1422360"/>
           </a:xfrm>
           <a:prstGeom prst="rect">
             <a:avLst/>
@@ -1564,7 +1546,7 @@
         <p:txBody>
           <a:bodyPr/>
           <a:p>
-            <a:fld id="{E8D0A77A-9CF4-4FCB-98DE-7D72DCE51F04}" type="slidenum">
+            <a:fld id="{B7C8CC8C-A16F-4BCF-9713-BA763141C11F}" type="slidenum">
               <a:t>&lt;#&gt;</a:t>
             </a:fld>
           </a:p>
@@ -1626,7 +1608,7 @@
         <p:spPr>
           <a:xfrm>
             <a:off x="1143000" y="841680"/>
-            <a:ext cx="6857280" cy="1789920"/>
+            <a:ext cx="6856920" cy="1789560"/>
           </a:xfrm>
           <a:prstGeom prst="rect">
             <a:avLst/>
@@ -1663,7 +1645,7 @@
         <p:spPr>
           <a:xfrm>
             <a:off x="457200" y="1203480"/>
-            <a:ext cx="8229240" cy="2982960"/>
+            <a:ext cx="8228880" cy="2982600"/>
           </a:xfrm>
           <a:prstGeom prst="rect">
             <a:avLst/>
@@ -1721,7 +1703,7 @@
         <p:txBody>
           <a:bodyPr/>
           <a:p>
-            <a:fld id="{7E7B30A4-E9F3-4146-BEE8-9C0833521D72}" type="slidenum">
+            <a:fld id="{9DDDC89F-2118-445D-AB4E-4D2DCB600962}" type="slidenum">
               <a:t>&lt;#&gt;</a:t>
             </a:fld>
           </a:p>
@@ -1783,7 +1765,7 @@
         <p:spPr>
           <a:xfrm>
             <a:off x="1143000" y="841680"/>
-            <a:ext cx="6857280" cy="1789920"/>
+            <a:ext cx="6856920" cy="1789560"/>
           </a:xfrm>
           <a:prstGeom prst="rect">
             <a:avLst/>
@@ -1820,7 +1802,7 @@
         <p:spPr>
           <a:xfrm>
             <a:off x="457200" y="1203480"/>
-            <a:ext cx="8229240" cy="2982960"/>
+            <a:ext cx="8228880" cy="2982600"/>
           </a:xfrm>
           <a:prstGeom prst="rect">
             <a:avLst/>
@@ -1875,7 +1857,7 @@
         <p:txBody>
           <a:bodyPr/>
           <a:p>
-            <a:fld id="{DA1B6273-21D7-422E-904C-37D1A38B30C2}" type="slidenum">
+            <a:fld id="{FC37D2FB-44E3-453E-AA80-62E79FB9A3CA}" type="slidenum">
               <a:t>&lt;#&gt;</a:t>
             </a:fld>
           </a:p>
@@ -1937,7 +1919,7 @@
         <p:spPr>
           <a:xfrm>
             <a:off x="1143000" y="841680"/>
-            <a:ext cx="6857280" cy="1789920"/>
+            <a:ext cx="6856920" cy="1789560"/>
           </a:xfrm>
           <a:prstGeom prst="rect">
             <a:avLst/>
@@ -1974,7 +1956,7 @@
         <p:spPr>
           <a:xfrm>
             <a:off x="457200" y="1203480"/>
-            <a:ext cx="4015800" cy="2982960"/>
+            <a:ext cx="4015440" cy="2982600"/>
           </a:xfrm>
           <a:prstGeom prst="rect">
             <a:avLst/>
@@ -2007,8 +1989,8 @@
         </p:nvSpPr>
         <p:spPr>
           <a:xfrm>
-            <a:off x="4674240" y="1203480"/>
-            <a:ext cx="4015800" cy="2982960"/>
+            <a:off x="4673880" y="1203480"/>
+            <a:ext cx="4015440" cy="2982600"/>
           </a:xfrm>
           <a:prstGeom prst="rect">
             <a:avLst/>
@@ -2063,7 +2045,7 @@
         <p:txBody>
           <a:bodyPr/>
           <a:p>
-            <a:fld id="{DD3B14E8-4FA4-4761-B49D-37216F174524}" type="slidenum">
+            <a:fld id="{1E025734-52B2-4AEC-BF45-AFFECED1E5C1}" type="slidenum">
               <a:t>&lt;#&gt;</a:t>
             </a:fld>
           </a:p>
@@ -2125,7 +2107,7 @@
         <p:spPr>
           <a:xfrm>
             <a:off x="1143000" y="841680"/>
-            <a:ext cx="6857280" cy="1789920"/>
+            <a:ext cx="6856920" cy="1789560"/>
           </a:xfrm>
           <a:prstGeom prst="rect">
             <a:avLst/>
@@ -2183,7 +2165,7 @@
         <p:txBody>
           <a:bodyPr/>
           <a:p>
-            <a:fld id="{429F4906-9D3A-4157-95A3-1C7F166D729A}" type="slidenum">
+            <a:fld id="{4B0B69C0-2240-41B4-9709-A007E084BD9A}" type="slidenum">
               <a:t>&lt;#&gt;</a:t>
             </a:fld>
           </a:p>
@@ -2245,7 +2227,7 @@
         <p:spPr>
           <a:xfrm>
             <a:off x="1143000" y="841680"/>
-            <a:ext cx="6857280" cy="8298360"/>
+            <a:ext cx="6856920" cy="8296560"/>
           </a:xfrm>
           <a:prstGeom prst="rect">
             <a:avLst/>
@@ -2303,7 +2285,7 @@
         <p:txBody>
           <a:bodyPr/>
           <a:p>
-            <a:fld id="{87FBB8D1-63C7-479F-BA44-3D8A6B30E31C}" type="slidenum">
+            <a:fld id="{B2912D69-A112-4C31-955E-0981A27138B2}" type="slidenum">
               <a:t>&lt;#&gt;</a:t>
             </a:fld>
           </a:p>
@@ -2365,7 +2347,7 @@
         <p:spPr>
           <a:xfrm>
             <a:off x="1143000" y="841680"/>
-            <a:ext cx="6857280" cy="1789920"/>
+            <a:ext cx="6856920" cy="1789560"/>
           </a:xfrm>
           <a:prstGeom prst="rect">
             <a:avLst/>
@@ -2402,7 +2384,7 @@
         <p:spPr>
           <a:xfrm>
             <a:off x="457200" y="1203480"/>
-            <a:ext cx="4015800" cy="1422720"/>
+            <a:ext cx="4015440" cy="1422360"/>
           </a:xfrm>
           <a:prstGeom prst="rect">
             <a:avLst/>
@@ -2435,8 +2417,8 @@
         </p:nvSpPr>
         <p:spPr>
           <a:xfrm>
-            <a:off x="4674240" y="1203480"/>
-            <a:ext cx="4015800" cy="2982960"/>
+            <a:off x="4673880" y="1203480"/>
+            <a:ext cx="4015440" cy="2982600"/>
           </a:xfrm>
           <a:prstGeom prst="rect">
             <a:avLst/>
@@ -2469,8 +2451,8 @@
         </p:nvSpPr>
         <p:spPr>
           <a:xfrm>
-            <a:off x="457200" y="2761920"/>
-            <a:ext cx="4015800" cy="1422720"/>
+            <a:off x="457200" y="2761200"/>
+            <a:ext cx="4015440" cy="1422360"/>
           </a:xfrm>
           <a:prstGeom prst="rect">
             <a:avLst/>
@@ -2525,7 +2507,7 @@
         <p:txBody>
           <a:bodyPr/>
           <a:p>
-            <a:fld id="{A8E72178-BDD7-4850-A3E9-A0A3368F1CB0}" type="slidenum">
+            <a:fld id="{B2C781B7-46AD-4A09-98E8-35B8DE490F78}" type="slidenum">
               <a:t>&lt;#&gt;</a:t>
             </a:fld>
           </a:p>
@@ -2587,7 +2569,7 @@
         <p:spPr>
           <a:xfrm>
             <a:off x="1143000" y="841680"/>
-            <a:ext cx="6857280" cy="1789920"/>
+            <a:ext cx="6856920" cy="1789560"/>
           </a:xfrm>
           <a:prstGeom prst="rect">
             <a:avLst/>
@@ -2624,7 +2606,7 @@
         <p:spPr>
           <a:xfrm>
             <a:off x="457200" y="1203480"/>
-            <a:ext cx="4015800" cy="2982960"/>
+            <a:ext cx="4015440" cy="2982600"/>
           </a:xfrm>
           <a:prstGeom prst="rect">
             <a:avLst/>
@@ -2657,8 +2639,8 @@
         </p:nvSpPr>
         <p:spPr>
           <a:xfrm>
-            <a:off x="4674240" y="1203480"/>
-            <a:ext cx="4015800" cy="1422720"/>
+            <a:off x="4673880" y="1203480"/>
+            <a:ext cx="4015440" cy="1422360"/>
           </a:xfrm>
           <a:prstGeom prst="rect">
             <a:avLst/>
@@ -2691,8 +2673,8 @@
         </p:nvSpPr>
         <p:spPr>
           <a:xfrm>
-            <a:off x="4674240" y="2761920"/>
-            <a:ext cx="4015800" cy="1422720"/>
+            <a:off x="4673880" y="2761200"/>
+            <a:ext cx="4015440" cy="1422360"/>
           </a:xfrm>
           <a:prstGeom prst="rect">
             <a:avLst/>
@@ -2747,7 +2729,7 @@
         <p:txBody>
           <a:bodyPr/>
           <a:p>
-            <a:fld id="{15D58378-B3BE-46C9-ADB0-828C6FFB75BA}" type="slidenum">
+            <a:fld id="{43532CA0-9EDF-4741-A1B5-7AD217804ED3}" type="slidenum">
               <a:t>&lt;#&gt;</a:t>
             </a:fld>
           </a:p>
@@ -2809,7 +2791,7 @@
         <p:spPr>
           <a:xfrm>
             <a:off x="1143000" y="841680"/>
-            <a:ext cx="6857280" cy="1789920"/>
+            <a:ext cx="6856920" cy="1789560"/>
           </a:xfrm>
           <a:prstGeom prst="rect">
             <a:avLst/>
@@ -2846,7 +2828,7 @@
         <p:spPr>
           <a:xfrm>
             <a:off x="457200" y="1203480"/>
-            <a:ext cx="4015800" cy="1422720"/>
+            <a:ext cx="4015440" cy="1422360"/>
           </a:xfrm>
           <a:prstGeom prst="rect">
             <a:avLst/>
@@ -2879,8 +2861,8 @@
         </p:nvSpPr>
         <p:spPr>
           <a:xfrm>
-            <a:off x="4674240" y="1203480"/>
-            <a:ext cx="4015800" cy="1422720"/>
+            <a:off x="4673880" y="1203480"/>
+            <a:ext cx="4015440" cy="1422360"/>
           </a:xfrm>
           <a:prstGeom prst="rect">
             <a:avLst/>
@@ -2913,8 +2895,8 @@
         </p:nvSpPr>
         <p:spPr>
           <a:xfrm>
-            <a:off x="457200" y="2761920"/>
-            <a:ext cx="8229240" cy="1422720"/>
+            <a:off x="457200" y="2761200"/>
+            <a:ext cx="8228880" cy="1422360"/>
           </a:xfrm>
           <a:prstGeom prst="rect">
             <a:avLst/>
@@ -2969,7 +2951,7 @@
         <p:txBody>
           <a:bodyPr/>
           <a:p>
-            <a:fld id="{BF5D0F7C-591D-4B99-B418-806965AAA1BC}" type="slidenum">
+            <a:fld id="{FF967B81-237B-4EDC-A2A9-9CFDC23DA9DD}" type="slidenum">
               <a:t>&lt;#&gt;</a:t>
             </a:fld>
           </a:p>
@@ -3038,7 +3020,7 @@
         <p:spPr>
           <a:xfrm>
             <a:off x="1143000" y="841680"/>
-            <a:ext cx="6857280" cy="1789920"/>
+            <a:ext cx="6856920" cy="1789560"/>
           </a:xfrm>
           <a:prstGeom prst="rect">
             <a:avLst/>
@@ -3057,13 +3039,7 @@
               <a:rPr b="0" lang="en-US" sz="1800" spc="-1" strike="noStrike">
                 <a:latin typeface="Arial"/>
               </a:rPr>
-              <a:t>Click to edit the title text </a:t>
-            </a:r>
-            <a:r>
-              <a:rPr b="0" lang="en-US" sz="1800" spc="-1" strike="noStrike">
-                <a:latin typeface="Arial"/>
-              </a:rPr>
-              <a:t>format</a:t>
+              <a:t>Click to edit the title text format</a:t>
             </a:r>
             <a:endParaRPr b="0" lang="en-US" sz="1800" spc="-1" strike="noStrike">
               <a:latin typeface="Arial"/>
@@ -3074,173 +3050,6 @@
       <p:sp>
         <p:nvSpPr>
           <p:cNvPr id="1" name="PlaceHolder 2"/>
-          <p:cNvSpPr>
-            <a:spLocks noGrp="1"/>
-          </p:cNvSpPr>
-          <p:nvPr>
-            <p:ph type="ftr" idx="1"/>
-          </p:nvPr>
-        </p:nvSpPr>
-        <p:spPr>
-          <a:xfrm>
-            <a:off x="3029040" y="4767120"/>
-            <a:ext cx="3085560" cy="273240"/>
-          </a:xfrm>
-          <a:prstGeom prst="rect">
-            <a:avLst/>
-          </a:prstGeom>
-          <a:noFill/>
-          <a:ln w="0">
-            <a:noFill/>
-          </a:ln>
-        </p:spPr>
-        <p:txBody>
-          <a:bodyPr lIns="90000" rIns="90000" tIns="45000" bIns="45000" anchor="ctr">
-            <a:noAutofit/>
-          </a:bodyPr>
-          <a:lstStyle>
-            <a:lvl1pPr algn="ctr">
-              <a:lnSpc>
-                <a:spcPct val="100000"/>
-              </a:lnSpc>
-              <a:buNone/>
-              <a:defRPr b="0" lang="en-US" sz="1400" spc="-1" strike="noStrike">
-                <a:latin typeface="Times New Roman"/>
-              </a:defRPr>
-            </a:lvl1pPr>
-          </a:lstStyle>
-          <a:p>
-            <a:pPr algn="ctr">
-              <a:lnSpc>
-                <a:spcPct val="100000"/>
-              </a:lnSpc>
-              <a:buNone/>
-            </a:pPr>
-            <a:r>
-              <a:rPr b="0" lang="en-US" sz="1400" spc="-1" strike="noStrike">
-                <a:latin typeface="Times New Roman"/>
-              </a:rPr>
-              <a:t>&lt;footer&gt;</a:t>
-            </a:r>
-            <a:endParaRPr b="0" lang="en-US" sz="1400" spc="-1" strike="noStrike">
-              <a:latin typeface="Times New Roman"/>
-            </a:endParaRPr>
-          </a:p>
-        </p:txBody>
-      </p:sp>
-      <p:sp>
-        <p:nvSpPr>
-          <p:cNvPr id="2" name="PlaceHolder 3"/>
-          <p:cNvSpPr>
-            <a:spLocks noGrp="1"/>
-          </p:cNvSpPr>
-          <p:nvPr>
-            <p:ph type="sldNum" idx="2"/>
-          </p:nvPr>
-        </p:nvSpPr>
-        <p:spPr>
-          <a:xfrm>
-            <a:off x="6458040" y="4767120"/>
-            <a:ext cx="2056680" cy="273240"/>
-          </a:xfrm>
-          <a:prstGeom prst="rect">
-            <a:avLst/>
-          </a:prstGeom>
-          <a:noFill/>
-          <a:ln w="0">
-            <a:noFill/>
-          </a:ln>
-        </p:spPr>
-        <p:txBody>
-          <a:bodyPr lIns="90000" rIns="90000" tIns="45000" bIns="45000" anchor="ctr">
-            <a:noAutofit/>
-          </a:bodyPr>
-          <a:lstStyle>
-            <a:lvl1pPr algn="r">
-              <a:lnSpc>
-                <a:spcPct val="100000"/>
-              </a:lnSpc>
-              <a:buNone/>
-              <a:defRPr b="0" lang="en-US" sz="900" spc="-1" strike="noStrike">
-                <a:solidFill>
-                  <a:srgbClr val="8b8b8b"/>
-                </a:solidFill>
-                <a:latin typeface="Calibri"/>
-              </a:defRPr>
-            </a:lvl1pPr>
-          </a:lstStyle>
-          <a:p>
-            <a:pPr algn="r">
-              <a:lnSpc>
-                <a:spcPct val="100000"/>
-              </a:lnSpc>
-              <a:buNone/>
-            </a:pPr>
-            <a:fld id="{217FC6FD-B503-450E-B946-7318D8F1EEAC}" type="slidenum">
-              <a:rPr b="0" lang="en-US" sz="900" spc="-1" strike="noStrike">
-                <a:solidFill>
-                  <a:srgbClr val="8b8b8b"/>
-                </a:solidFill>
-                <a:latin typeface="Calibri"/>
-              </a:rPr>
-              <a:t>&lt;number&gt;</a:t>
-            </a:fld>
-            <a:endParaRPr b="0" lang="en-US" sz="900" spc="-1" strike="noStrike">
-              <a:latin typeface="Times New Roman"/>
-            </a:endParaRPr>
-          </a:p>
-        </p:txBody>
-      </p:sp>
-      <p:sp>
-        <p:nvSpPr>
-          <p:cNvPr id="3" name="PlaceHolder 4"/>
-          <p:cNvSpPr>
-            <a:spLocks noGrp="1"/>
-          </p:cNvSpPr>
-          <p:nvPr>
-            <p:ph type="dt" idx="3"/>
-          </p:nvPr>
-        </p:nvSpPr>
-        <p:spPr>
-          <a:xfrm>
-            <a:off x="628560" y="4767120"/>
-            <a:ext cx="2056680" cy="273240"/>
-          </a:xfrm>
-          <a:prstGeom prst="rect">
-            <a:avLst/>
-          </a:prstGeom>
-          <a:noFill/>
-          <a:ln w="0">
-            <a:noFill/>
-          </a:ln>
-        </p:spPr>
-        <p:txBody>
-          <a:bodyPr lIns="90000" rIns="90000" tIns="45000" bIns="45000" anchor="ctr">
-            <a:noAutofit/>
-          </a:bodyPr>
-          <a:lstStyle>
-            <a:lvl1pPr>
-              <a:defRPr b="0" lang="en-US" sz="1400" spc="-1" strike="noStrike">
-                <a:latin typeface="Times New Roman"/>
-              </a:defRPr>
-            </a:lvl1pPr>
-          </a:lstStyle>
-          <a:p>
-            <a:r>
-              <a:rPr b="0" lang="en-US" sz="1400" spc="-1" strike="noStrike">
-                <a:latin typeface="Times New Roman"/>
-              </a:rPr>
-              <a:t>&lt;date/time&gt;</a:t>
-            </a:r>
-            <a:endParaRPr b="0" lang="en-US" sz="1400" spc="-1" strike="noStrike">
-              <a:latin typeface="Times New Roman"/>
-            </a:endParaRPr>
-          </a:p>
-        </p:txBody>
-      </p:sp>
-      <p:sp>
-        <p:nvSpPr>
-          <p:cNvPr id="4" name="PlaceHolder 5"/>
           <p:cNvSpPr>
             <a:spLocks noGrp="1"/>
           </p:cNvSpPr>
@@ -3251,7 +3060,7 @@
         <p:spPr>
           <a:xfrm>
             <a:off x="457200" y="1203480"/>
-            <a:ext cx="8229240" cy="2982960"/>
+            <a:ext cx="8228880" cy="2982600"/>
           </a:xfrm>
           <a:prstGeom prst="rect">
             <a:avLst/>
@@ -3278,12 +3087,12 @@
               <a:buChar char=""/>
             </a:pPr>
             <a:r>
-              <a:rPr b="0" lang="en-US" sz="3200" spc="-1" strike="noStrike">
+              <a:rPr b="0" lang="en-US" sz="1800" spc="-1" strike="noStrike">
                 <a:latin typeface="Arial"/>
               </a:rPr>
               <a:t>Click to edit the outline text format</a:t>
             </a:r>
-            <a:endParaRPr b="0" lang="en-US" sz="3200" spc="-1" strike="noStrike">
+            <a:endParaRPr b="0" lang="en-US" sz="1800" spc="-1" strike="noStrike">
               <a:latin typeface="Arial"/>
             </a:endParaRPr>
           </a:p>
@@ -3300,12 +3109,12 @@
               <a:buChar char=""/>
             </a:pPr>
             <a:r>
-              <a:rPr b="0" lang="en-US" sz="2800" spc="-1" strike="noStrike">
+              <a:rPr b="0" lang="en-US" sz="1800" spc="-1" strike="noStrike">
                 <a:latin typeface="Arial"/>
               </a:rPr>
               <a:t>Second Outline Level</a:t>
             </a:r>
-            <a:endParaRPr b="0" lang="en-US" sz="2800" spc="-1" strike="noStrike">
+            <a:endParaRPr b="0" lang="en-US" sz="1800" spc="-1" strike="noStrike">
               <a:latin typeface="Arial"/>
             </a:endParaRPr>
           </a:p>
@@ -3322,12 +3131,12 @@
               <a:buChar char=""/>
             </a:pPr>
             <a:r>
-              <a:rPr b="0" lang="en-US" sz="2400" spc="-1" strike="noStrike">
+              <a:rPr b="0" lang="en-US" sz="1800" spc="-1" strike="noStrike">
                 <a:latin typeface="Arial"/>
               </a:rPr>
               <a:t>Third Outline Level</a:t>
             </a:r>
-            <a:endParaRPr b="0" lang="en-US" sz="2400" spc="-1" strike="noStrike">
+            <a:endParaRPr b="0" lang="en-US" sz="1800" spc="-1" strike="noStrike">
               <a:latin typeface="Arial"/>
             </a:endParaRPr>
           </a:p>
@@ -3344,12 +3153,12 @@
               <a:buChar char=""/>
             </a:pPr>
             <a:r>
-              <a:rPr b="0" lang="en-US" sz="2000" spc="-1" strike="noStrike">
+              <a:rPr b="0" lang="en-US" sz="1800" spc="-1" strike="noStrike">
                 <a:latin typeface="Arial"/>
               </a:rPr>
               <a:t>Fourth Outline Level</a:t>
             </a:r>
-            <a:endParaRPr b="0" lang="en-US" sz="2000" spc="-1" strike="noStrike">
+            <a:endParaRPr b="0" lang="en-US" sz="1800" spc="-1" strike="noStrike">
               <a:latin typeface="Arial"/>
             </a:endParaRPr>
           </a:p>
@@ -3366,12 +3175,12 @@
               <a:buChar char=""/>
             </a:pPr>
             <a:r>
-              <a:rPr b="0" lang="en-US" sz="2000" spc="-1" strike="noStrike">
+              <a:rPr b="0" lang="en-US" sz="1800" spc="-1" strike="noStrike">
                 <a:latin typeface="Arial"/>
               </a:rPr>
               <a:t>Fifth Outline Level</a:t>
             </a:r>
-            <a:endParaRPr b="0" lang="en-US" sz="2000" spc="-1" strike="noStrike">
+            <a:endParaRPr b="0" lang="en-US" sz="1800" spc="-1" strike="noStrike">
               <a:latin typeface="Arial"/>
             </a:endParaRPr>
           </a:p>
@@ -3388,12 +3197,12 @@
               <a:buChar char=""/>
             </a:pPr>
             <a:r>
-              <a:rPr b="0" lang="en-US" sz="2000" spc="-1" strike="noStrike">
+              <a:rPr b="0" lang="en-US" sz="1800" spc="-1" strike="noStrike">
                 <a:latin typeface="Arial"/>
               </a:rPr>
               <a:t>Sixth Outline Level</a:t>
             </a:r>
-            <a:endParaRPr b="0" lang="en-US" sz="2000" spc="-1" strike="noStrike">
+            <a:endParaRPr b="0" lang="en-US" sz="1800" spc="-1" strike="noStrike">
               <a:latin typeface="Arial"/>
             </a:endParaRPr>
           </a:p>
@@ -3410,13 +3219,180 @@
               <a:buChar char=""/>
             </a:pPr>
             <a:r>
-              <a:rPr b="0" lang="en-US" sz="2000" spc="-1" strike="noStrike">
+              <a:rPr b="0" lang="en-US" sz="1800" spc="-1" strike="noStrike">
                 <a:latin typeface="Arial"/>
               </a:rPr>
               <a:t>Seventh Outline Level</a:t>
             </a:r>
-            <a:endParaRPr b="0" lang="en-US" sz="2000" spc="-1" strike="noStrike">
-              <a:latin typeface="Arial"/>
+            <a:endParaRPr b="0" lang="en-US" sz="1800" spc="-1" strike="noStrike">
+              <a:latin typeface="Arial"/>
+            </a:endParaRPr>
+          </a:p>
+        </p:txBody>
+      </p:sp>
+      <p:sp>
+        <p:nvSpPr>
+          <p:cNvPr id="2" name="PlaceHolder 3"/>
+          <p:cNvSpPr>
+            <a:spLocks noGrp="1"/>
+          </p:cNvSpPr>
+          <p:nvPr>
+            <p:ph type="ftr" idx="1"/>
+          </p:nvPr>
+        </p:nvSpPr>
+        <p:spPr>
+          <a:xfrm>
+            <a:off x="3029040" y="4767120"/>
+            <a:ext cx="3085200" cy="272880"/>
+          </a:xfrm>
+          <a:prstGeom prst="rect">
+            <a:avLst/>
+          </a:prstGeom>
+          <a:noFill/>
+          <a:ln w="0">
+            <a:noFill/>
+          </a:ln>
+        </p:spPr>
+        <p:txBody>
+          <a:bodyPr lIns="90000" rIns="90000" tIns="45000" bIns="45000" anchor="ctr">
+            <a:noAutofit/>
+          </a:bodyPr>
+          <a:lstStyle>
+            <a:lvl1pPr algn="ctr">
+              <a:lnSpc>
+                <a:spcPct val="100000"/>
+              </a:lnSpc>
+              <a:buNone/>
+              <a:defRPr b="0" lang="en-US" sz="1400" spc="-1" strike="noStrike">
+                <a:latin typeface="Times New Roman"/>
+              </a:defRPr>
+            </a:lvl1pPr>
+          </a:lstStyle>
+          <a:p>
+            <a:pPr algn="ctr">
+              <a:lnSpc>
+                <a:spcPct val="100000"/>
+              </a:lnSpc>
+              <a:buNone/>
+            </a:pPr>
+            <a:r>
+              <a:rPr b="0" lang="en-US" sz="1400" spc="-1" strike="noStrike">
+                <a:latin typeface="Times New Roman"/>
+              </a:rPr>
+              <a:t>&lt;footer&gt;</a:t>
+            </a:r>
+            <a:endParaRPr b="0" lang="en-US" sz="1400" spc="-1" strike="noStrike">
+              <a:latin typeface="Times New Roman"/>
+            </a:endParaRPr>
+          </a:p>
+        </p:txBody>
+      </p:sp>
+      <p:sp>
+        <p:nvSpPr>
+          <p:cNvPr id="3" name="PlaceHolder 4"/>
+          <p:cNvSpPr>
+            <a:spLocks noGrp="1"/>
+          </p:cNvSpPr>
+          <p:nvPr>
+            <p:ph type="sldNum" idx="2"/>
+          </p:nvPr>
+        </p:nvSpPr>
+        <p:spPr>
+          <a:xfrm>
+            <a:off x="6458040" y="4767120"/>
+            <a:ext cx="2056320" cy="272880"/>
+          </a:xfrm>
+          <a:prstGeom prst="rect">
+            <a:avLst/>
+          </a:prstGeom>
+          <a:noFill/>
+          <a:ln w="0">
+            <a:noFill/>
+          </a:ln>
+        </p:spPr>
+        <p:txBody>
+          <a:bodyPr lIns="90000" rIns="90000" tIns="45000" bIns="45000" anchor="ctr">
+            <a:noAutofit/>
+          </a:bodyPr>
+          <a:lstStyle>
+            <a:lvl1pPr algn="r">
+              <a:lnSpc>
+                <a:spcPct val="100000"/>
+              </a:lnSpc>
+              <a:buNone/>
+              <a:defRPr b="0" lang="en-US" sz="900" spc="-1" strike="noStrike">
+                <a:solidFill>
+                  <a:srgbClr val="8b8b8b"/>
+                </a:solidFill>
+                <a:latin typeface="Calibri"/>
+              </a:defRPr>
+            </a:lvl1pPr>
+          </a:lstStyle>
+          <a:p>
+            <a:pPr algn="r">
+              <a:lnSpc>
+                <a:spcPct val="100000"/>
+              </a:lnSpc>
+              <a:buNone/>
+            </a:pPr>
+            <a:fld id="{F44D30DE-1C3E-4D7E-BEFF-B356C1E5393A}" type="slidenum">
+              <a:rPr b="0" lang="en-US" sz="900" spc="-1" strike="noStrike">
+                <a:solidFill>
+                  <a:srgbClr val="8b8b8b"/>
+                </a:solidFill>
+                <a:latin typeface="Calibri"/>
+              </a:rPr>
+              <a:t>&lt;number&gt;</a:t>
+            </a:fld>
+            <a:endParaRPr b="0" lang="en-US" sz="900" spc="-1" strike="noStrike">
+              <a:latin typeface="Times New Roman"/>
+            </a:endParaRPr>
+          </a:p>
+        </p:txBody>
+      </p:sp>
+      <p:sp>
+        <p:nvSpPr>
+          <p:cNvPr id="4" name="PlaceHolder 5"/>
+          <p:cNvSpPr>
+            <a:spLocks noGrp="1"/>
+          </p:cNvSpPr>
+          <p:nvPr>
+            <p:ph type="dt" idx="3"/>
+          </p:nvPr>
+        </p:nvSpPr>
+        <p:spPr>
+          <a:xfrm>
+            <a:off x="628560" y="4767120"/>
+            <a:ext cx="2056320" cy="272880"/>
+          </a:xfrm>
+          <a:prstGeom prst="rect">
+            <a:avLst/>
+          </a:prstGeom>
+          <a:noFill/>
+          <a:ln w="0">
+            <a:noFill/>
+          </a:ln>
+        </p:spPr>
+        <p:txBody>
+          <a:bodyPr lIns="90000" rIns="90000" tIns="45000" bIns="45000" anchor="ctr">
+            <a:noAutofit/>
+          </a:bodyPr>
+          <a:lstStyle>
+            <a:lvl1pPr>
+              <a:defRPr b="0" lang="en-US" sz="1400" spc="-1" strike="noStrike">
+                <a:latin typeface="Times New Roman"/>
+              </a:defRPr>
+            </a:lvl1pPr>
+          </a:lstStyle>
+          <a:p>
+            <a:r>
+              <a:rPr b="0" lang="en-US" sz="1400" spc="-1" strike="noStrike">
+                <a:latin typeface="Times New Roman"/>
+              </a:rPr>
+              <a:t>&lt;date/time&gt;</a:t>
+            </a:r>
+            <a:endParaRPr b="0" lang="en-US" sz="1400" spc="-1" strike="noStrike">
+              <a:latin typeface="Times New Roman"/>
             </a:endParaRPr>
           </a:p>
         </p:txBody>
@@ -3467,7 +3443,7 @@
         <p:spPr>
           <a:xfrm>
             <a:off x="186840" y="178200"/>
-            <a:ext cx="8769960" cy="4757760"/>
+            <a:ext cx="8769600" cy="4757400"/>
           </a:xfrm>
           <a:prstGeom prst="roundRect">
             <a:avLst>
@@ -3505,7 +3481,7 @@
         <p:spPr>
           <a:xfrm>
             <a:off x="460080" y="4445640"/>
-            <a:ext cx="2998800" cy="269280"/>
+            <a:ext cx="2998440" cy="268920"/>
           </a:xfrm>
           <a:prstGeom prst="rect">
             <a:avLst/>
@@ -3571,7 +3547,7 @@
         <p:spPr>
           <a:xfrm>
             <a:off x="2423160" y="4446360"/>
-            <a:ext cx="290880" cy="290880"/>
+            <a:ext cx="290520" cy="290520"/>
           </a:xfrm>
           <a:prstGeom prst="rect">
             <a:avLst/>
@@ -3590,7 +3566,7 @@
         <p:spPr>
           <a:xfrm>
             <a:off x="460080" y="622080"/>
-            <a:ext cx="6925680" cy="3306600"/>
+            <a:ext cx="6925320" cy="3306240"/>
           </a:xfrm>
           <a:prstGeom prst="rect">
             <a:avLst/>
@@ -3646,7 +3622,7 @@
         <p:spPr>
           <a:xfrm>
             <a:off x="5753880" y="2557440"/>
-            <a:ext cx="4009680" cy="3133080"/>
+            <a:ext cx="4009320" cy="3132720"/>
           </a:xfrm>
           <a:prstGeom prst="rect">
             <a:avLst/>
@@ -3695,7 +3671,7 @@
         <p:spPr>
           <a:xfrm>
             <a:off x="186840" y="178200"/>
-            <a:ext cx="8769960" cy="4757760"/>
+            <a:ext cx="8769600" cy="4757400"/>
           </a:xfrm>
           <a:prstGeom prst="roundRect">
             <a:avLst>
@@ -3733,7 +3709,7 @@
         <p:spPr>
           <a:xfrm>
             <a:off x="1640880" y="4489920"/>
-            <a:ext cx="2998800" cy="269280"/>
+            <a:ext cx="2998440" cy="268920"/>
           </a:xfrm>
           <a:prstGeom prst="rect">
             <a:avLst/>
@@ -3795,7 +3771,7 @@
         <p:spPr>
           <a:xfrm>
             <a:off x="867240" y="3488040"/>
-            <a:ext cx="256680" cy="256680"/>
+            <a:ext cx="256320" cy="256320"/>
           </a:xfrm>
           <a:prstGeom prst="ellipse">
             <a:avLst/>
@@ -3830,7 +3806,7 @@
         <p:spPr>
           <a:xfrm>
             <a:off x="351000" y="3691440"/>
-            <a:ext cx="1289160" cy="1133280"/>
+            <a:ext cx="1288800" cy="1132920"/>
           </a:xfrm>
           <a:prstGeom prst="rect">
             <a:avLst/>
@@ -3849,7 +3825,7 @@
         <p:spPr>
           <a:xfrm>
             <a:off x="460080" y="622080"/>
-            <a:ext cx="6925680" cy="3306600"/>
+            <a:ext cx="6925320" cy="3306240"/>
           </a:xfrm>
           <a:prstGeom prst="rect">
             <a:avLst/>
@@ -3905,7 +3881,7 @@
         <p:spPr>
           <a:xfrm>
             <a:off x="5753880" y="2557440"/>
-            <a:ext cx="4009680" cy="3133080"/>
+            <a:ext cx="4009320" cy="3132720"/>
           </a:xfrm>
           <a:prstGeom prst="rect">
             <a:avLst/>
@@ -3958,7 +3934,7 @@
         <p:spPr>
           <a:xfrm>
             <a:off x="5753880" y="2557440"/>
-            <a:ext cx="4009680" cy="3133080"/>
+            <a:ext cx="4009320" cy="3132720"/>
           </a:xfrm>
           <a:prstGeom prst="rect">
             <a:avLst/>
@@ -3977,7 +3953,7 @@
         <p:spPr>
           <a:xfrm>
             <a:off x="185760" y="831240"/>
-            <a:ext cx="899280" cy="899280"/>
+            <a:ext cx="898920" cy="898920"/>
           </a:xfrm>
           <a:prstGeom prst="ellipse">
             <a:avLst/>
@@ -4037,7 +4013,7 @@
         <p:spPr>
           <a:xfrm>
             <a:off x="185760" y="2381400"/>
-            <a:ext cx="899280" cy="887400"/>
+            <a:ext cx="898920" cy="887040"/>
           </a:xfrm>
           <a:prstGeom prst="ellipse">
             <a:avLst/>
@@ -4097,7 +4073,7 @@
         <p:spPr>
           <a:xfrm>
             <a:off x="185760" y="3860640"/>
-            <a:ext cx="899280" cy="899280"/>
+            <a:ext cx="898920" cy="898920"/>
           </a:xfrm>
           <a:prstGeom prst="ellipse">
             <a:avLst/>
@@ -4157,7 +4133,7 @@
         <p:spPr>
           <a:xfrm>
             <a:off x="967680" y="797040"/>
-            <a:ext cx="3764520" cy="550440"/>
+            <a:ext cx="3764160" cy="550080"/>
           </a:xfrm>
           <a:prstGeom prst="rect">
             <a:avLst/>
@@ -4219,7 +4195,7 @@
         <p:spPr>
           <a:xfrm>
             <a:off x="967680" y="1332720"/>
-            <a:ext cx="3764520" cy="789480"/>
+            <a:ext cx="3764160" cy="789120"/>
           </a:xfrm>
           <a:prstGeom prst="rect">
             <a:avLst/>
@@ -4281,7 +4257,7 @@
         <p:spPr>
           <a:xfrm>
             <a:off x="964080" y="2292480"/>
-            <a:ext cx="3764520" cy="550440"/>
+            <a:ext cx="3764160" cy="550080"/>
           </a:xfrm>
           <a:prstGeom prst="rect">
             <a:avLst/>
@@ -4333,7 +4309,7 @@
         <p:spPr>
           <a:xfrm>
             <a:off x="964080" y="2825280"/>
-            <a:ext cx="3764520" cy="843120"/>
+            <a:ext cx="3764160" cy="842760"/>
           </a:xfrm>
           <a:prstGeom prst="rect">
             <a:avLst/>
@@ -4395,7 +4371,7 @@
         <p:spPr>
           <a:xfrm>
             <a:off x="964080" y="3777840"/>
-            <a:ext cx="3764520" cy="550440"/>
+            <a:ext cx="3764160" cy="550080"/>
           </a:xfrm>
           <a:prstGeom prst="rect">
             <a:avLst/>
@@ -4447,7 +4423,7 @@
         <p:spPr>
           <a:xfrm>
             <a:off x="964080" y="4310640"/>
-            <a:ext cx="3764520" cy="794520"/>
+            <a:ext cx="3764160" cy="794160"/>
           </a:xfrm>
           <a:prstGeom prst="rect">
             <a:avLst/>
@@ -4509,7 +4485,7 @@
         <p:spPr>
           <a:xfrm>
             <a:off x="5084640" y="987840"/>
-            <a:ext cx="3687480" cy="3496680"/>
+            <a:ext cx="3687120" cy="3496320"/>
           </a:xfrm>
           <a:prstGeom prst="roundRect">
             <a:avLst>
@@ -4573,7 +4549,7 @@
         <p:spPr>
           <a:xfrm>
             <a:off x="8519760" y="4831560"/>
-            <a:ext cx="484560" cy="226800"/>
+            <a:ext cx="484200" cy="226800"/>
           </a:xfrm>
           <a:prstGeom prst="rect">
             <a:avLst/>
@@ -4625,7 +4601,7 @@
         <p:spPr>
           <a:xfrm>
             <a:off x="421200" y="228600"/>
-            <a:ext cx="8457840" cy="685440"/>
+            <a:ext cx="8457480" cy="685080"/>
           </a:xfrm>
           <a:prstGeom prst="rect">
             <a:avLst/>
@@ -4654,7 +4630,11 @@
             </a:pPr>
             <a:r>
               <a:rPr b="0" lang="en-US" sz="1800" spc="-1" strike="noStrike">
-                <a:latin typeface="Arial"/>
+                <a:solidFill>
+                  <a:srgbClr val="000000"/>
+                </a:solidFill>
+                <a:latin typeface="Arial"/>
+                <a:ea typeface="DejaVu Sans"/>
               </a:rPr>
               <a:t>TITLE</a:t>
             </a:r>
@@ -4703,7 +4683,7 @@
         <p:spPr>
           <a:xfrm>
             <a:off x="506520" y="1484640"/>
-            <a:ext cx="2556720" cy="2055240"/>
+            <a:ext cx="2556360" cy="2054880"/>
           </a:xfrm>
           <a:prstGeom prst="roundRect">
             <a:avLst>
@@ -4743,7 +4723,7 @@
         <p:spPr>
           <a:xfrm>
             <a:off x="624240" y="1616760"/>
-            <a:ext cx="2289600" cy="729000"/>
+            <a:ext cx="2289240" cy="728640"/>
           </a:xfrm>
           <a:prstGeom prst="rect">
             <a:avLst/>
@@ -4795,7 +4775,7 @@
         <p:spPr>
           <a:xfrm>
             <a:off x="624240" y="2400480"/>
-            <a:ext cx="2289600" cy="1162080"/>
+            <a:ext cx="2289240" cy="1161720"/>
           </a:xfrm>
           <a:prstGeom prst="rect">
             <a:avLst/>
@@ -4857,7 +4837,7 @@
         <p:spPr>
           <a:xfrm>
             <a:off x="3309120" y="2066040"/>
-            <a:ext cx="2556720" cy="2055240"/>
+            <a:ext cx="2556360" cy="2054880"/>
           </a:xfrm>
           <a:prstGeom prst="roundRect">
             <a:avLst>
@@ -4897,7 +4877,7 @@
         <p:spPr>
           <a:xfrm>
             <a:off x="3426840" y="2198160"/>
-            <a:ext cx="2289600" cy="729000"/>
+            <a:ext cx="2289240" cy="728640"/>
           </a:xfrm>
           <a:prstGeom prst="rect">
             <a:avLst/>
@@ -4949,7 +4929,7 @@
         <p:spPr>
           <a:xfrm>
             <a:off x="3426840" y="2981880"/>
-            <a:ext cx="2289600" cy="1162080"/>
+            <a:ext cx="2289240" cy="1161720"/>
           </a:xfrm>
           <a:prstGeom prst="rect">
             <a:avLst/>
@@ -5001,7 +4981,7 @@
         <p:spPr>
           <a:xfrm>
             <a:off x="6111720" y="2659320"/>
-            <a:ext cx="2556720" cy="2055240"/>
+            <a:ext cx="2556360" cy="2054880"/>
           </a:xfrm>
           <a:prstGeom prst="roundRect">
             <a:avLst>
@@ -5041,7 +5021,7 @@
         <p:spPr>
           <a:xfrm>
             <a:off x="6229440" y="2791440"/>
-            <a:ext cx="2289600" cy="729000"/>
+            <a:ext cx="2289240" cy="728640"/>
           </a:xfrm>
           <a:prstGeom prst="rect">
             <a:avLst/>
@@ -5076,7 +5056,7 @@
                 <a:latin typeface="Arial"/>
                 <a:ea typeface="DejaVu Sans"/>
               </a:rPr>
-              <a:t>SUBTITLE2</a:t>
+              <a:t>SUBTITLE3</a:t>
             </a:r>
             <a:endParaRPr b="0" lang="en-US" sz="1400" spc="-1" strike="noStrike">
               <a:latin typeface="Arial"/>
@@ -5093,7 +5073,7 @@
         <p:spPr>
           <a:xfrm>
             <a:off x="6229440" y="3574800"/>
-            <a:ext cx="2289600" cy="1162080"/>
+            <a:ext cx="2289240" cy="1161720"/>
           </a:xfrm>
           <a:prstGeom prst="rect">
             <a:avLst/>
@@ -5128,7 +5108,7 @@
                 <a:latin typeface="Arial"/>
                 <a:ea typeface="DejaVu Sans"/>
               </a:rPr>
-              <a:t>TEXT2</a:t>
+              <a:t>TEXT3</a:t>
             </a:r>
             <a:endParaRPr b="0" lang="en-US" sz="1100" spc="-1" strike="noStrike">
               <a:latin typeface="Arial"/>
@@ -5145,7 +5125,7 @@
         <p:spPr>
           <a:xfrm>
             <a:off x="8519760" y="4831560"/>
-            <a:ext cx="484560" cy="226800"/>
+            <a:ext cx="484200" cy="226800"/>
           </a:xfrm>
           <a:prstGeom prst="rect">
             <a:avLst/>
@@ -5197,7 +5177,7 @@
         <p:spPr>
           <a:xfrm>
             <a:off x="457200" y="228600"/>
-            <a:ext cx="8229240" cy="1142640"/>
+            <a:ext cx="8228880" cy="1142280"/>
           </a:xfrm>
           <a:prstGeom prst="rect">
             <a:avLst/>
@@ -5226,7 +5206,11 @@
             </a:pPr>
             <a:r>
               <a:rPr b="0" lang="en-US" sz="1800" spc="-1" strike="noStrike">
-                <a:latin typeface="Arial"/>
+                <a:solidFill>
+                  <a:srgbClr val="000000"/>
+                </a:solidFill>
+                <a:latin typeface="Arial"/>
+                <a:ea typeface="DejaVu Sans"/>
               </a:rPr>
               <a:t>TITLE</a:t>
             </a:r>
@@ -5275,7 +5259,7 @@
         <p:spPr>
           <a:xfrm>
             <a:off x="3601800" y="3271680"/>
-            <a:ext cx="5236200" cy="1320840"/>
+            <a:ext cx="5235840" cy="1320480"/>
           </a:xfrm>
           <a:prstGeom prst="roundRect">
             <a:avLst>
@@ -5313,7 +5297,7 @@
         <p:spPr>
           <a:xfrm>
             <a:off x="6308640" y="1028880"/>
-            <a:ext cx="2532960" cy="2056680"/>
+            <a:ext cx="2532600" cy="2056320"/>
           </a:xfrm>
           <a:prstGeom prst="roundRect">
             <a:avLst>
@@ -5351,7 +5335,7 @@
         <p:spPr>
           <a:xfrm>
             <a:off x="3604320" y="1014480"/>
-            <a:ext cx="2532960" cy="2056680"/>
+            <a:ext cx="2532600" cy="2056320"/>
           </a:xfrm>
           <a:prstGeom prst="roundRect">
             <a:avLst>
@@ -5389,7 +5373,7 @@
         <p:spPr>
           <a:xfrm>
             <a:off x="3696480" y="1059120"/>
-            <a:ext cx="2343240" cy="713520"/>
+            <a:ext cx="2342880" cy="713160"/>
           </a:xfrm>
           <a:prstGeom prst="rect">
             <a:avLst/>
@@ -5451,7 +5435,7 @@
         <p:spPr>
           <a:xfrm>
             <a:off x="3696480" y="1843560"/>
-            <a:ext cx="2343240" cy="1141920"/>
+            <a:ext cx="2342880" cy="1141560"/>
           </a:xfrm>
           <a:prstGeom prst="rect">
             <a:avLst/>
@@ -5513,7 +5497,7 @@
         <p:spPr>
           <a:xfrm>
             <a:off x="6400080" y="1059120"/>
-            <a:ext cx="2340000" cy="713520"/>
+            <a:ext cx="2339640" cy="713160"/>
           </a:xfrm>
           <a:prstGeom prst="rect">
             <a:avLst/>
@@ -5565,7 +5549,7 @@
         <p:spPr>
           <a:xfrm>
             <a:off x="6400080" y="1843560"/>
-            <a:ext cx="2340000" cy="1141920"/>
+            <a:ext cx="2339640" cy="1141560"/>
           </a:xfrm>
           <a:prstGeom prst="rect">
             <a:avLst/>
@@ -5627,7 +5611,7 @@
         <p:spPr>
           <a:xfrm>
             <a:off x="3696480" y="3362040"/>
-            <a:ext cx="5236200" cy="328680"/>
+            <a:ext cx="5235840" cy="328320"/>
           </a:xfrm>
           <a:prstGeom prst="rect">
             <a:avLst/>
@@ -5679,7 +5663,7 @@
         <p:spPr>
           <a:xfrm>
             <a:off x="3696480" y="3713400"/>
-            <a:ext cx="5146560" cy="713520"/>
+            <a:ext cx="5146200" cy="713160"/>
           </a:xfrm>
           <a:prstGeom prst="rect">
             <a:avLst/>
@@ -5741,7 +5725,7 @@
         <p:spPr>
           <a:xfrm>
             <a:off x="384840" y="1028880"/>
-            <a:ext cx="3002400" cy="3564000"/>
+            <a:ext cx="3002040" cy="3563640"/>
           </a:xfrm>
           <a:prstGeom prst="roundRect">
             <a:avLst>
@@ -5805,7 +5789,7 @@
         <p:spPr>
           <a:xfrm>
             <a:off x="8519760" y="4831560"/>
-            <a:ext cx="484560" cy="226800"/>
+            <a:ext cx="484200" cy="226800"/>
           </a:xfrm>
           <a:prstGeom prst="rect">
             <a:avLst/>
@@ -5857,7 +5841,7 @@
         <p:spPr>
           <a:xfrm>
             <a:off x="313200" y="228600"/>
-            <a:ext cx="8457840" cy="685440"/>
+            <a:ext cx="8457480" cy="685080"/>
           </a:xfrm>
           <a:prstGeom prst="rect">
             <a:avLst/>
@@ -5886,7 +5870,11 @@
             </a:pPr>
             <a:r>
               <a:rPr b="0" lang="en-US" sz="1800" spc="-1" strike="noStrike">
-                <a:latin typeface="Arial"/>
+                <a:solidFill>
+                  <a:srgbClr val="000000"/>
+                </a:solidFill>
+                <a:latin typeface="Arial"/>
+                <a:ea typeface="DejaVu Sans"/>
               </a:rPr>
               <a:t>TITLE</a:t>
             </a:r>
@@ -5939,7 +5927,7 @@
         <p:spPr>
           <a:xfrm>
             <a:off x="-877680" y="2245320"/>
-            <a:ext cx="4613040" cy="3604680"/>
+            <a:ext cx="4612680" cy="3604320"/>
           </a:xfrm>
           <a:prstGeom prst="rect">
             <a:avLst/>
@@ -5958,7 +5946,7 @@
         <p:spPr>
           <a:xfrm>
             <a:off x="4157640" y="631080"/>
-            <a:ext cx="899280" cy="899280"/>
+            <a:ext cx="898920" cy="898920"/>
           </a:xfrm>
           <a:prstGeom prst="ellipse">
             <a:avLst/>
@@ -6020,7 +6008,7 @@
         <p:spPr>
           <a:xfrm>
             <a:off x="4157640" y="2127600"/>
-            <a:ext cx="899280" cy="887400"/>
+            <a:ext cx="898920" cy="887040"/>
           </a:xfrm>
           <a:prstGeom prst="ellipse">
             <a:avLst/>
@@ -6082,7 +6070,7 @@
         <p:spPr>
           <a:xfrm>
             <a:off x="4157640" y="3612240"/>
-            <a:ext cx="899280" cy="899280"/>
+            <a:ext cx="898920" cy="898920"/>
           </a:xfrm>
           <a:prstGeom prst="ellipse">
             <a:avLst/>
@@ -6144,7 +6132,7 @@
         <p:spPr>
           <a:xfrm>
             <a:off x="5146560" y="489600"/>
-            <a:ext cx="3578760" cy="550440"/>
+            <a:ext cx="3578400" cy="550080"/>
           </a:xfrm>
           <a:prstGeom prst="rect">
             <a:avLst/>
@@ -6206,7 +6194,7 @@
         <p:spPr>
           <a:xfrm>
             <a:off x="5146560" y="1025280"/>
-            <a:ext cx="3578760" cy="789480"/>
+            <a:ext cx="3578400" cy="789120"/>
           </a:xfrm>
           <a:prstGeom prst="rect">
             <a:avLst/>
@@ -6268,7 +6256,7 @@
         <p:spPr>
           <a:xfrm>
             <a:off x="5142960" y="1985400"/>
-            <a:ext cx="3578760" cy="550440"/>
+            <a:ext cx="3578400" cy="550080"/>
           </a:xfrm>
           <a:prstGeom prst="rect">
             <a:avLst/>
@@ -6320,7 +6308,7 @@
         <p:spPr>
           <a:xfrm>
             <a:off x="5142960" y="2517840"/>
-            <a:ext cx="3578760" cy="843120"/>
+            <a:ext cx="3578400" cy="842760"/>
           </a:xfrm>
           <a:prstGeom prst="rect">
             <a:avLst/>
@@ -6382,7 +6370,7 @@
         <p:spPr>
           <a:xfrm>
             <a:off x="5142960" y="3470760"/>
-            <a:ext cx="3578760" cy="550440"/>
+            <a:ext cx="3578400" cy="550080"/>
           </a:xfrm>
           <a:prstGeom prst="rect">
             <a:avLst/>
@@ -6434,7 +6422,7 @@
         <p:spPr>
           <a:xfrm>
             <a:off x="5142960" y="4003560"/>
-            <a:ext cx="3578760" cy="794520"/>
+            <a:ext cx="3578400" cy="794160"/>
           </a:xfrm>
           <a:prstGeom prst="rect">
             <a:avLst/>
@@ -6496,7 +6484,7 @@
         <p:spPr>
           <a:xfrm>
             <a:off x="8519760" y="4831560"/>
-            <a:ext cx="484560" cy="226800"/>
+            <a:ext cx="484200" cy="226800"/>
           </a:xfrm>
           <a:prstGeom prst="rect">
             <a:avLst/>
@@ -6548,7 +6536,7 @@
         <p:spPr>
           <a:xfrm>
             <a:off x="264600" y="228600"/>
-            <a:ext cx="3657240" cy="2016360"/>
+            <a:ext cx="3656880" cy="2016000"/>
           </a:xfrm>
           <a:prstGeom prst="rect">
             <a:avLst/>
@@ -6577,7 +6565,11 @@
             </a:pPr>
             <a:r>
               <a:rPr b="0" lang="en-US" sz="1800" spc="-1" strike="noStrike">
-                <a:latin typeface="Arial"/>
+                <a:solidFill>
+                  <a:srgbClr val="000000"/>
+                </a:solidFill>
+                <a:latin typeface="Arial"/>
+                <a:ea typeface="DejaVu Sans"/>
               </a:rPr>
               <a:t>TITLE</a:t>
             </a:r>
@@ -6626,7 +6618,7 @@
         <p:spPr>
           <a:xfrm>
             <a:off x="4238640" y="831240"/>
-            <a:ext cx="899280" cy="899280"/>
+            <a:ext cx="898920" cy="898920"/>
           </a:xfrm>
           <a:prstGeom prst="ellipse">
             <a:avLst/>
@@ -6686,7 +6678,7 @@
         <p:spPr>
           <a:xfrm>
             <a:off x="4238640" y="2243880"/>
-            <a:ext cx="899280" cy="887400"/>
+            <a:ext cx="898920" cy="887040"/>
           </a:xfrm>
           <a:prstGeom prst="ellipse">
             <a:avLst/>
@@ -6746,7 +6738,7 @@
         <p:spPr>
           <a:xfrm>
             <a:off x="4238640" y="3667320"/>
-            <a:ext cx="899280" cy="899280"/>
+            <a:ext cx="898920" cy="898920"/>
           </a:xfrm>
           <a:prstGeom prst="ellipse">
             <a:avLst/>
@@ -6806,7 +6798,7 @@
         <p:spPr>
           <a:xfrm>
             <a:off x="5020200" y="797040"/>
-            <a:ext cx="3764520" cy="550440"/>
+            <a:ext cx="3764160" cy="550080"/>
           </a:xfrm>
           <a:prstGeom prst="rect">
             <a:avLst/>
@@ -6868,7 +6860,7 @@
         <p:spPr>
           <a:xfrm>
             <a:off x="5020200" y="1332720"/>
-            <a:ext cx="3764520" cy="789480"/>
+            <a:ext cx="3764160" cy="789120"/>
           </a:xfrm>
           <a:prstGeom prst="rect">
             <a:avLst/>
@@ -6930,7 +6922,7 @@
         <p:spPr>
           <a:xfrm>
             <a:off x="5016600" y="2155320"/>
-            <a:ext cx="3764520" cy="550440"/>
+            <a:ext cx="3764160" cy="550080"/>
           </a:xfrm>
           <a:prstGeom prst="rect">
             <a:avLst/>
@@ -6982,7 +6974,7 @@
         <p:spPr>
           <a:xfrm>
             <a:off x="5016600" y="2687760"/>
-            <a:ext cx="3764520" cy="843120"/>
+            <a:ext cx="3764160" cy="842760"/>
           </a:xfrm>
           <a:prstGeom prst="rect">
             <a:avLst/>
@@ -7044,7 +7036,7 @@
         <p:spPr>
           <a:xfrm>
             <a:off x="5016600" y="3584880"/>
-            <a:ext cx="3764520" cy="550440"/>
+            <a:ext cx="3764160" cy="550080"/>
           </a:xfrm>
           <a:prstGeom prst="rect">
             <a:avLst/>
@@ -7096,7 +7088,7 @@
         <p:spPr>
           <a:xfrm>
             <a:off x="5016600" y="4117320"/>
-            <a:ext cx="3764520" cy="794520"/>
+            <a:ext cx="3764160" cy="794160"/>
           </a:xfrm>
           <a:prstGeom prst="rect">
             <a:avLst/>
@@ -7158,7 +7150,7 @@
         <p:spPr>
           <a:xfrm>
             <a:off x="384840" y="987840"/>
-            <a:ext cx="3687480" cy="3496680"/>
+            <a:ext cx="3687120" cy="3496320"/>
           </a:xfrm>
           <a:prstGeom prst="roundRect">
             <a:avLst>
@@ -7222,7 +7214,7 @@
         <p:spPr>
           <a:xfrm>
             <a:off x="8519760" y="4831560"/>
-            <a:ext cx="484560" cy="226800"/>
+            <a:ext cx="484200" cy="226800"/>
           </a:xfrm>
           <a:prstGeom prst="rect">
             <a:avLst/>
@@ -7274,7 +7266,7 @@
         <p:spPr>
           <a:xfrm>
             <a:off x="300600" y="228600"/>
-            <a:ext cx="8614440" cy="685440"/>
+            <a:ext cx="8614080" cy="685080"/>
           </a:xfrm>
           <a:prstGeom prst="rect">
             <a:avLst/>
@@ -7303,7 +7295,11 @@
             </a:pPr>
             <a:r>
               <a:rPr b="0" lang="en-US" sz="1800" spc="-1" strike="noStrike">
-                <a:latin typeface="Arial"/>
+                <a:solidFill>
+                  <a:srgbClr val="000000"/>
+                </a:solidFill>
+                <a:latin typeface="Arial"/>
+                <a:ea typeface="DejaVu Sans"/>
               </a:rPr>
               <a:t>TITLE</a:t>
             </a:r>
@@ -7352,7 +7348,7 @@
         <p:spPr>
           <a:xfrm>
             <a:off x="0" y="3075480"/>
-            <a:ext cx="9143280" cy="2494800"/>
+            <a:ext cx="9142920" cy="2494440"/>
           </a:xfrm>
           <a:prstGeom prst="roundRect">
             <a:avLst>
@@ -7416,7 +7412,7 @@
         <p:spPr>
           <a:xfrm>
             <a:off x="474840" y="841680"/>
-            <a:ext cx="2556720" cy="2055240"/>
+            <a:ext cx="2556360" cy="2054880"/>
           </a:xfrm>
           <a:prstGeom prst="roundRect">
             <a:avLst>
@@ -7456,7 +7452,7 @@
         <p:spPr>
           <a:xfrm>
             <a:off x="592920" y="973800"/>
-            <a:ext cx="2289600" cy="729000"/>
+            <a:ext cx="2289240" cy="728640"/>
           </a:xfrm>
           <a:prstGeom prst="rect">
             <a:avLst/>
@@ -7508,7 +7504,7 @@
         <p:spPr>
           <a:xfrm>
             <a:off x="592920" y="1757520"/>
-            <a:ext cx="2289600" cy="1162080"/>
+            <a:ext cx="2289240" cy="1161720"/>
           </a:xfrm>
           <a:prstGeom prst="rect">
             <a:avLst/>
@@ -7570,7 +7566,7 @@
         <p:spPr>
           <a:xfrm>
             <a:off x="3309120" y="841680"/>
-            <a:ext cx="2556720" cy="2055240"/>
+            <a:ext cx="2556360" cy="2054880"/>
           </a:xfrm>
           <a:prstGeom prst="roundRect">
             <a:avLst>
@@ -7610,7 +7606,7 @@
         <p:spPr>
           <a:xfrm>
             <a:off x="3426840" y="973800"/>
-            <a:ext cx="2289600" cy="729000"/>
+            <a:ext cx="2289240" cy="728640"/>
           </a:xfrm>
           <a:prstGeom prst="rect">
             <a:avLst/>
@@ -7662,7 +7658,7 @@
         <p:spPr>
           <a:xfrm>
             <a:off x="3426840" y="1757520"/>
-            <a:ext cx="2289600" cy="1162080"/>
+            <a:ext cx="2289240" cy="1161720"/>
           </a:xfrm>
           <a:prstGeom prst="rect">
             <a:avLst/>
@@ -7714,7 +7710,7 @@
         <p:spPr>
           <a:xfrm>
             <a:off x="6143040" y="841680"/>
-            <a:ext cx="2556720" cy="2055240"/>
+            <a:ext cx="2556360" cy="2054880"/>
           </a:xfrm>
           <a:prstGeom prst="roundRect">
             <a:avLst>
@@ -7754,7 +7750,7 @@
         <p:spPr>
           <a:xfrm>
             <a:off x="6260760" y="973800"/>
-            <a:ext cx="2289600" cy="729000"/>
+            <a:ext cx="2289240" cy="728640"/>
           </a:xfrm>
           <a:prstGeom prst="rect">
             <a:avLst/>
@@ -7806,7 +7802,7 @@
         <p:spPr>
           <a:xfrm>
             <a:off x="6260760" y="1757520"/>
-            <a:ext cx="2289600" cy="1162080"/>
+            <a:ext cx="2289240" cy="1161720"/>
           </a:xfrm>
           <a:prstGeom prst="rect">
             <a:avLst/>
@@ -7858,7 +7854,7 @@
         <p:spPr>
           <a:xfrm>
             <a:off x="8519760" y="4831560"/>
-            <a:ext cx="484560" cy="226800"/>
+            <a:ext cx="484200" cy="226800"/>
           </a:xfrm>
           <a:prstGeom prst="rect">
             <a:avLst/>
@@ -7910,7 +7906,7 @@
         <p:spPr>
           <a:xfrm>
             <a:off x="457200" y="349200"/>
-            <a:ext cx="8457840" cy="1022040"/>
+            <a:ext cx="8457480" cy="1021680"/>
           </a:xfrm>
           <a:prstGeom prst="rect">
             <a:avLst/>
@@ -7939,7 +7935,11 @@
             </a:pPr>
             <a:r>
               <a:rPr b="0" lang="en-US" sz="1800" spc="-1" strike="noStrike">
-                <a:latin typeface="Arial"/>
+                <a:solidFill>
+                  <a:srgbClr val="000000"/>
+                </a:solidFill>
+                <a:latin typeface="Arial"/>
+                <a:ea typeface="DejaVu Sans"/>
               </a:rPr>
               <a:t>TITLE</a:t>
             </a:r>
@@ -7995,7 +7995,7 @@
         <p:spPr>
           <a:xfrm>
             <a:off x="5014080" y="250200"/>
-            <a:ext cx="3820320" cy="4624920"/>
+            <a:ext cx="3819960" cy="4624560"/>
           </a:xfrm>
           <a:prstGeom prst="roundRect">
             <a:avLst>
@@ -8061,7 +8061,7 @@
         <p:spPr>
           <a:xfrm>
             <a:off x="329400" y="250200"/>
-            <a:ext cx="4424760" cy="4624920"/>
+            <a:ext cx="4424400" cy="4624560"/>
           </a:xfrm>
           <a:prstGeom prst="roundRect">
             <a:avLst>
@@ -8099,7 +8099,7 @@
         <p:spPr>
           <a:xfrm>
             <a:off x="581760" y="828720"/>
-            <a:ext cx="3901680" cy="550440"/>
+            <a:ext cx="3901320" cy="550080"/>
           </a:xfrm>
           <a:prstGeom prst="rect">
             <a:avLst/>
@@ -8161,7 +8161,7 @@
         <p:spPr>
           <a:xfrm>
             <a:off x="581760" y="1364400"/>
-            <a:ext cx="3901680" cy="789480"/>
+            <a:ext cx="3901320" cy="789120"/>
           </a:xfrm>
           <a:prstGeom prst="rect">
             <a:avLst/>
@@ -8223,7 +8223,7 @@
         <p:spPr>
           <a:xfrm>
             <a:off x="578160" y="2154600"/>
-            <a:ext cx="3901680" cy="550440"/>
+            <a:ext cx="3901320" cy="550080"/>
           </a:xfrm>
           <a:prstGeom prst="rect">
             <a:avLst/>
@@ -8275,7 +8275,7 @@
         <p:spPr>
           <a:xfrm>
             <a:off x="578160" y="2687040"/>
-            <a:ext cx="3901680" cy="843120"/>
+            <a:ext cx="3901320" cy="842760"/>
           </a:xfrm>
           <a:prstGeom prst="rect">
             <a:avLst/>
@@ -8337,7 +8337,7 @@
         <p:spPr>
           <a:xfrm>
             <a:off x="578160" y="3482280"/>
-            <a:ext cx="3901680" cy="550440"/>
+            <a:ext cx="3901320" cy="550080"/>
           </a:xfrm>
           <a:prstGeom prst="rect">
             <a:avLst/>
@@ -8389,7 +8389,7 @@
         <p:spPr>
           <a:xfrm>
             <a:off x="578160" y="4015080"/>
-            <a:ext cx="3901680" cy="794520"/>
+            <a:ext cx="3901320" cy="794160"/>
           </a:xfrm>
           <a:prstGeom prst="rect">
             <a:avLst/>
@@ -8451,7 +8451,7 @@
         <p:spPr>
           <a:xfrm>
             <a:off x="8519760" y="4831560"/>
-            <a:ext cx="484560" cy="226800"/>
+            <a:ext cx="484200" cy="226800"/>
           </a:xfrm>
           <a:prstGeom prst="rect">
             <a:avLst/>
@@ -8503,7 +8503,7 @@
         <p:spPr>
           <a:xfrm>
             <a:off x="493200" y="300600"/>
-            <a:ext cx="4078440" cy="842040"/>
+            <a:ext cx="4078080" cy="841680"/>
           </a:xfrm>
           <a:prstGeom prst="rect">
             <a:avLst/>
@@ -8532,7 +8532,11 @@
             </a:pPr>
             <a:r>
               <a:rPr b="0" lang="en-US" sz="1800" spc="-1" strike="noStrike">
-                <a:latin typeface="Arial"/>
+                <a:solidFill>
+                  <a:srgbClr val="000000"/>
+                </a:solidFill>
+                <a:latin typeface="Arial"/>
+                <a:ea typeface="DejaVu Sans"/>
               </a:rPr>
               <a:t>TITLE</a:t>
             </a:r>
@@ -8581,7 +8585,7 @@
         <p:spPr>
           <a:xfrm>
             <a:off x="479160" y="2886480"/>
-            <a:ext cx="365040" cy="359640"/>
+            <a:ext cx="364680" cy="359280"/>
           </a:xfrm>
           <a:prstGeom prst="roundRect">
             <a:avLst>
@@ -8611,7 +8615,7 @@
         <p:spPr>
           <a:xfrm>
             <a:off x="3440880" y="2886480"/>
-            <a:ext cx="365040" cy="359640"/>
+            <a:ext cx="364680" cy="359280"/>
           </a:xfrm>
           <a:prstGeom prst="roundRect">
             <a:avLst>
@@ -8641,7 +8645,7 @@
         <p:spPr>
           <a:xfrm>
             <a:off x="6402960" y="2886480"/>
-            <a:ext cx="365040" cy="359640"/>
+            <a:ext cx="364680" cy="359280"/>
           </a:xfrm>
           <a:prstGeom prst="roundRect">
             <a:avLst>
@@ -8671,7 +8675,7 @@
         <p:spPr>
           <a:xfrm>
             <a:off x="479160" y="2883600"/>
-            <a:ext cx="365040" cy="363960"/>
+            <a:ext cx="364680" cy="363960"/>
           </a:xfrm>
           <a:prstGeom prst="rect">
             <a:avLst/>
@@ -8723,7 +8727,7 @@
         <p:spPr>
           <a:xfrm>
             <a:off x="3440880" y="2883600"/>
-            <a:ext cx="365040" cy="363960"/>
+            <a:ext cx="364680" cy="363960"/>
           </a:xfrm>
           <a:prstGeom prst="rect">
             <a:avLst/>
@@ -8775,7 +8779,7 @@
         <p:spPr>
           <a:xfrm>
             <a:off x="6402960" y="2883600"/>
-            <a:ext cx="365040" cy="363960"/>
+            <a:ext cx="364680" cy="363960"/>
           </a:xfrm>
           <a:prstGeom prst="rect">
             <a:avLst/>
@@ -8827,7 +8831,7 @@
         <p:spPr>
           <a:xfrm>
             <a:off x="858960" y="2571840"/>
-            <a:ext cx="2354760" cy="713520"/>
+            <a:ext cx="2354400" cy="713160"/>
           </a:xfrm>
           <a:prstGeom prst="rect">
             <a:avLst/>
@@ -8889,7 +8893,7 @@
         <p:spPr>
           <a:xfrm>
             <a:off x="858960" y="3356280"/>
-            <a:ext cx="2354760" cy="1564920"/>
+            <a:ext cx="2354400" cy="1564560"/>
           </a:xfrm>
           <a:prstGeom prst="rect">
             <a:avLst/>
@@ -8951,7 +8955,7 @@
         <p:spPr>
           <a:xfrm>
             <a:off x="3821040" y="2571840"/>
-            <a:ext cx="2354760" cy="713520"/>
+            <a:ext cx="2354400" cy="713160"/>
           </a:xfrm>
           <a:prstGeom prst="rect">
             <a:avLst/>
@@ -9013,7 +9017,7 @@
         <p:spPr>
           <a:xfrm>
             <a:off x="3821040" y="3356280"/>
-            <a:ext cx="2354760" cy="1564920"/>
+            <a:ext cx="2354400" cy="1564560"/>
           </a:xfrm>
           <a:prstGeom prst="rect">
             <a:avLst/>
@@ -9075,7 +9079,7 @@
         <p:spPr>
           <a:xfrm>
             <a:off x="6782760" y="2571840"/>
-            <a:ext cx="2293920" cy="713520"/>
+            <a:ext cx="2293560" cy="713160"/>
           </a:xfrm>
           <a:prstGeom prst="rect">
             <a:avLst/>
@@ -9137,7 +9141,7 @@
         <p:spPr>
           <a:xfrm>
             <a:off x="6782760" y="3356280"/>
-            <a:ext cx="2293920" cy="1564920"/>
+            <a:ext cx="2293560" cy="1564560"/>
           </a:xfrm>
           <a:prstGeom prst="rect">
             <a:avLst/>
@@ -9199,7 +9203,7 @@
         <p:spPr>
           <a:xfrm>
             <a:off x="0" y="-478800"/>
-            <a:ext cx="9143280" cy="2327760"/>
+            <a:ext cx="9142920" cy="2327400"/>
           </a:xfrm>
           <a:prstGeom prst="roundRect">
             <a:avLst>
@@ -9263,7 +9267,7 @@
         <p:spPr>
           <a:xfrm>
             <a:off x="8519760" y="4831560"/>
-            <a:ext cx="484560" cy="226800"/>
+            <a:ext cx="484200" cy="226800"/>
           </a:xfrm>
           <a:prstGeom prst="rect">
             <a:avLst/>
@@ -9315,7 +9319,7 @@
         <p:spPr>
           <a:xfrm>
             <a:off x="228600" y="2057400"/>
-            <a:ext cx="8686440" cy="685440"/>
+            <a:ext cx="8686080" cy="685080"/>
           </a:xfrm>
           <a:prstGeom prst="rect">
             <a:avLst/>
@@ -9344,7 +9348,11 @@
             </a:pPr>
             <a:r>
               <a:rPr b="0" lang="en-US" sz="1800" spc="-1" strike="noStrike">
-                <a:latin typeface="Arial"/>
+                <a:solidFill>
+                  <a:srgbClr val="000000"/>
+                </a:solidFill>
+                <a:latin typeface="Arial"/>
+                <a:ea typeface="DejaVu Sans"/>
               </a:rPr>
               <a:t>TITLE</a:t>
             </a:r>
